--- a/presentation/HW2-presentation.pptx
+++ b/presentation/HW2-presentation.pptx
@@ -6031,7 +6031,7 @@
                   <a:schemeClr val="accent2"/>
                 </a:solidFill>
               </a:rPr>
-              <a:t>10+</a:t>
+              <a:t>10</a:t>
             </a:r>
             <a:endParaRPr lang="en-US" sz="6400" dirty="0"/>
           </a:p>
@@ -6117,7 +6117,7 @@
                   <a:schemeClr val="accent3"/>
                 </a:solidFill>
               </a:rPr>
-              <a:t>10+</a:t>
+              <a:t>24</a:t>
             </a:r>
             <a:endParaRPr lang="en-US" sz="6400" dirty="0"/>
           </a:p>
@@ -6203,7 +6203,7 @@
                   <a:schemeClr val="accent4"/>
                 </a:solidFill>
               </a:rPr>
-              <a:t>10+</a:t>
+              <a:t>20</a:t>
             </a:r>
             <a:endParaRPr lang="en-US" sz="6400" dirty="0"/>
           </a:p>
@@ -6289,7 +6289,7 @@
                   <a:schemeClr val="accent5"/>
                 </a:solidFill>
               </a:rPr>
-              <a:t>10+</a:t>
+              <a:t>30</a:t>
             </a:r>
             <a:endParaRPr lang="en-US" sz="6400" dirty="0"/>
           </a:p>
